--- a/EPrac2/BIOL365 Prac2_intro.pptx
+++ b/EPrac2/BIOL365 Prac2_intro.pptx
@@ -221,7 +221,7 @@
             <a:fld id="{6FE3E860-F498-4C2D-BF82-4BB6A34F4482}" type="datetimeFigureOut">
               <a:rPr lang="en-AU" smtClean="0"/>
               <a:pPr/>
-              <a:t>2/8/2024</a:t>
+              <a:t>31/7/2025</a:t>
             </a:fld>
             <a:endParaRPr lang="en-AU"/>
           </a:p>
@@ -884,7 +884,7 @@
           <a:p>
             <a:fld id="{E3D85FED-E5C6-2640-857E-7DCFF39350D1}" type="datetimeFigureOut">
               <a:rPr lang="en-AU" smtClean="0"/>
-              <a:t>2/8/2024</a:t>
+              <a:t>31/7/2025</a:t>
             </a:fld>
             <a:endParaRPr lang="en-AU"/>
           </a:p>
@@ -1120,7 +1120,7 @@
           <a:p>
             <a:fld id="{E3D85FED-E5C6-2640-857E-7DCFF39350D1}" type="datetimeFigureOut">
               <a:rPr lang="en-AU" smtClean="0"/>
-              <a:t>2/8/2024</a:t>
+              <a:t>31/7/2025</a:t>
             </a:fld>
             <a:endParaRPr lang="en-AU"/>
           </a:p>
@@ -1330,7 +1330,7 @@
           <a:p>
             <a:fld id="{E3D85FED-E5C6-2640-857E-7DCFF39350D1}" type="datetimeFigureOut">
               <a:rPr lang="en-AU" smtClean="0"/>
-              <a:t>2/8/2024</a:t>
+              <a:t>31/7/2025</a:t>
             </a:fld>
             <a:endParaRPr lang="en-AU"/>
           </a:p>
@@ -1791,7 +1791,7 @@
           <a:p>
             <a:fld id="{E3D85FED-E5C6-2640-857E-7DCFF39350D1}" type="datetimeFigureOut">
               <a:rPr lang="en-AU" smtClean="0"/>
-              <a:t>2/8/2024</a:t>
+              <a:t>31/7/2025</a:t>
             </a:fld>
             <a:endParaRPr lang="en-AU"/>
           </a:p>
@@ -2067,7 +2067,7 @@
           <a:p>
             <a:fld id="{E3D85FED-E5C6-2640-857E-7DCFF39350D1}" type="datetimeFigureOut">
               <a:rPr lang="en-AU" smtClean="0"/>
-              <a:t>2/8/2024</a:t>
+              <a:t>31/7/2025</a:t>
             </a:fld>
             <a:endParaRPr lang="en-AU"/>
           </a:p>
@@ -2335,7 +2335,7 @@
           <a:p>
             <a:fld id="{E3D85FED-E5C6-2640-857E-7DCFF39350D1}" type="datetimeFigureOut">
               <a:rPr lang="en-AU" smtClean="0"/>
-              <a:t>2/8/2024</a:t>
+              <a:t>31/7/2025</a:t>
             </a:fld>
             <a:endParaRPr lang="en-AU"/>
           </a:p>
@@ -2750,7 +2750,7 @@
           <a:p>
             <a:fld id="{E3D85FED-E5C6-2640-857E-7DCFF39350D1}" type="datetimeFigureOut">
               <a:rPr lang="en-AU" smtClean="0"/>
-              <a:t>2/8/2024</a:t>
+              <a:t>31/7/2025</a:t>
             </a:fld>
             <a:endParaRPr lang="en-AU"/>
           </a:p>
@@ -2892,7 +2892,7 @@
           <a:p>
             <a:fld id="{E3D85FED-E5C6-2640-857E-7DCFF39350D1}" type="datetimeFigureOut">
               <a:rPr lang="en-AU" smtClean="0"/>
-              <a:t>2/8/2024</a:t>
+              <a:t>31/7/2025</a:t>
             </a:fld>
             <a:endParaRPr lang="en-AU"/>
           </a:p>
@@ -3005,7 +3005,7 @@
           <a:p>
             <a:fld id="{E3D85FED-E5C6-2640-857E-7DCFF39350D1}" type="datetimeFigureOut">
               <a:rPr lang="en-AU" smtClean="0"/>
-              <a:t>2/8/2024</a:t>
+              <a:t>31/7/2025</a:t>
             </a:fld>
             <a:endParaRPr lang="en-AU"/>
           </a:p>
@@ -3318,7 +3318,7 @@
           <a:p>
             <a:fld id="{E3D85FED-E5C6-2640-857E-7DCFF39350D1}" type="datetimeFigureOut">
               <a:rPr lang="en-AU" smtClean="0"/>
-              <a:t>2/8/2024</a:t>
+              <a:t>31/7/2025</a:t>
             </a:fld>
             <a:endParaRPr lang="en-AU"/>
           </a:p>
@@ -3607,7 +3607,7 @@
           <a:p>
             <a:fld id="{E3D85FED-E5C6-2640-857E-7DCFF39350D1}" type="datetimeFigureOut">
               <a:rPr lang="en-AU" smtClean="0"/>
-              <a:t>2/8/2024</a:t>
+              <a:t>31/7/2025</a:t>
             </a:fld>
             <a:endParaRPr lang="en-AU"/>
           </a:p>
@@ -3853,7 +3853,7 @@
           <a:p>
             <a:fld id="{E3D85FED-E5C6-2640-857E-7DCFF39350D1}" type="datetimeFigureOut">
               <a:rPr lang="en-AU" smtClean="0"/>
-              <a:t>2/8/2024</a:t>
+              <a:t>31/7/2025</a:t>
             </a:fld>
             <a:endParaRPr lang="en-AU"/>
           </a:p>
@@ -6370,7 +6370,7 @@
           <a:p>
             <a:r>
               <a:rPr lang="en-AU" sz="3600" dirty="0"/>
-              <a:t>If you have not picked two seminar topics, you must come and speak to use to make your choice this week.</a:t>
+              <a:t>If you have not picked two seminar topics, you must come and speak to us to make your choice this week.</a:t>
             </a:r>
           </a:p>
         </p:txBody>
@@ -6405,6 +6405,42 @@
           <a:chExt cx="0" cy="0"/>
         </a:xfrm>
       </p:grpSpPr>
+      <p:pic>
+        <p:nvPicPr>
+          <p:cNvPr id="4" name="Picture 3" descr="A graph of a number of blue and white bars&#10;&#10;AI-generated content may be incorrect.">
+            <a:extLst>
+              <a:ext uri="{FF2B5EF4-FFF2-40B4-BE49-F238E27FC236}">
+                <a16:creationId xmlns:a16="http://schemas.microsoft.com/office/drawing/2014/main" id="{E88E6EC5-1E05-A629-17B9-36EF60AEBF03}"/>
+              </a:ext>
+            </a:extLst>
+          </p:cNvPr>
+          <p:cNvPicPr>
+            <a:picLocks noChangeAspect="1"/>
+          </p:cNvPicPr>
+          <p:nvPr/>
+        </p:nvPicPr>
+        <p:blipFill>
+          <a:blip r:embed="rId2">
+            <a:extLst>
+              <a:ext uri="{28A0092B-C50C-407E-A947-70E740481C1C}">
+                <a14:useLocalDpi xmlns:a14="http://schemas.microsoft.com/office/drawing/2010/main" val="0"/>
+              </a:ext>
+            </a:extLst>
+          </a:blip>
+          <a:stretch>
+            <a:fillRect/>
+          </a:stretch>
+        </p:blipFill>
+        <p:spPr>
+          <a:xfrm>
+            <a:off x="109499" y="1570107"/>
+            <a:ext cx="4430455" cy="5165583"/>
+          </a:xfrm>
+          <a:prstGeom prst="rect">
+            <a:avLst/>
+          </a:prstGeom>
+        </p:spPr>
+      </p:pic>
       <p:sp>
         <p:nvSpPr>
           <p:cNvPr id="2" name="Title 1">
@@ -6433,40 +6469,6 @@
           </a:p>
         </p:txBody>
       </p:sp>
-      <p:pic>
-        <p:nvPicPr>
-          <p:cNvPr id="5" name="Content Placeholder 4" descr="A screenshot of a graph&#10;&#10;Description automatically generated">
-            <a:extLst>
-              <a:ext uri="{FF2B5EF4-FFF2-40B4-BE49-F238E27FC236}">
-                <a16:creationId xmlns:a16="http://schemas.microsoft.com/office/drawing/2014/main" id="{1E5D9612-0A51-1513-7C68-70FAB69D6A8E}"/>
-              </a:ext>
-            </a:extLst>
-          </p:cNvPr>
-          <p:cNvPicPr>
-            <a:picLocks noGrp="1" noChangeAspect="1"/>
-          </p:cNvPicPr>
-          <p:nvPr>
-            <p:ph idx="1"/>
-          </p:nvPr>
-        </p:nvPicPr>
-        <p:blipFill rotWithShape="1">
-          <a:blip r:embed="rId2">
-            <a:extLst>
-              <a:ext uri="{28A0092B-C50C-407E-A947-70E740481C1C}">
-                <a14:useLocalDpi xmlns:a14="http://schemas.microsoft.com/office/drawing/2010/main" val="0"/>
-              </a:ext>
-            </a:extLst>
-          </a:blip>
-          <a:srcRect l="3709"/>
-          <a:stretch/>
-        </p:blipFill>
-        <p:spPr>
-          <a:xfrm>
-            <a:off x="323527" y="1462114"/>
-            <a:ext cx="4536505" cy="5279253"/>
-          </a:xfrm>
-        </p:spPr>
-      </p:pic>
       <p:sp>
         <p:nvSpPr>
           <p:cNvPr id="6" name="TextBox 5">
@@ -6521,7 +6523,7 @@
               <a:rPr lang="en-AU" dirty="0">
                 <a:hlinkClick r:id="rId3"/>
               </a:rPr>
-              <a:t>worldwide as of 2023</a:t>
+              <a:t>worldwide as of 2024</a:t>
             </a:r>
             <a:endParaRPr lang="en-AU" dirty="0"/>
           </a:p>
@@ -6717,10 +6719,10 @@
         </p:nvGrpSpPr>
         <p:grpSpPr>
           <a:xfrm>
-            <a:off x="109499" y="6011996"/>
-            <a:ext cx="1942221" cy="369332"/>
-            <a:chOff x="109499" y="6011996"/>
-            <a:chExt cx="1942221" cy="369332"/>
+            <a:off x="37491" y="6021288"/>
+            <a:ext cx="1911680" cy="369332"/>
+            <a:chOff x="140040" y="6011996"/>
+            <a:chExt cx="1911680" cy="369332"/>
           </a:xfrm>
         </p:grpSpPr>
         <p:sp>
@@ -6795,7 +6797,7 @@
           </p:nvSpPr>
           <p:spPr>
             <a:xfrm>
-              <a:off x="109499" y="6011996"/>
+              <a:off x="140040" y="6011996"/>
               <a:ext cx="502061" cy="369332"/>
             </a:xfrm>
             <a:prstGeom prst="rect">
@@ -8206,6 +8208,42 @@
           <a:chExt cx="0" cy="0"/>
         </a:xfrm>
       </p:grpSpPr>
+      <p:pic>
+        <p:nvPicPr>
+          <p:cNvPr id="5" name="Picture 4" descr="A blue and grey logo&#10;&#10;Description automatically generated">
+            <a:extLst>
+              <a:ext uri="{FF2B5EF4-FFF2-40B4-BE49-F238E27FC236}">
+                <a16:creationId xmlns:a16="http://schemas.microsoft.com/office/drawing/2014/main" id="{6EEDB009-E4EC-F5E7-402C-BF6328400AF1}"/>
+              </a:ext>
+            </a:extLst>
+          </p:cNvPr>
+          <p:cNvPicPr>
+            <a:picLocks noChangeAspect="1"/>
+          </p:cNvPicPr>
+          <p:nvPr/>
+        </p:nvPicPr>
+        <p:blipFill>
+          <a:blip r:embed="rId2">
+            <a:extLst>
+              <a:ext uri="{28A0092B-C50C-407E-A947-70E740481C1C}">
+                <a14:useLocalDpi xmlns:a14="http://schemas.microsoft.com/office/drawing/2010/main" val="0"/>
+              </a:ext>
+            </a:extLst>
+          </a:blip>
+          <a:stretch>
+            <a:fillRect/>
+          </a:stretch>
+        </p:blipFill>
+        <p:spPr>
+          <a:xfrm>
+            <a:off x="4726073" y="1228476"/>
+            <a:ext cx="1752600" cy="1409700"/>
+          </a:xfrm>
+          <a:prstGeom prst="rect">
+            <a:avLst/>
+          </a:prstGeom>
+        </p:spPr>
+      </p:pic>
       <p:sp>
         <p:nvSpPr>
           <p:cNvPr id="2" name="Title 1">
@@ -8270,7 +8308,7 @@
             <a:pPr lvl="1"/>
             <a:r>
               <a:rPr lang="en-AU" dirty="0"/>
-              <a:t>Has &gt;21,000 packages</a:t>
+              <a:t>Has &gt;21,000 packages (+1,500 since 2024)</a:t>
             </a:r>
           </a:p>
           <a:p>
@@ -8348,42 +8386,6 @@
           </a:p>
         </p:txBody>
       </p:sp>
-      <p:pic>
-        <p:nvPicPr>
-          <p:cNvPr id="5" name="Picture 4" descr="A blue and grey logo&#10;&#10;Description automatically generated">
-            <a:extLst>
-              <a:ext uri="{FF2B5EF4-FFF2-40B4-BE49-F238E27FC236}">
-                <a16:creationId xmlns:a16="http://schemas.microsoft.com/office/drawing/2014/main" id="{6EEDB009-E4EC-F5E7-402C-BF6328400AF1}"/>
-              </a:ext>
-            </a:extLst>
-          </p:cNvPr>
-          <p:cNvPicPr>
-            <a:picLocks noChangeAspect="1"/>
-          </p:cNvPicPr>
-          <p:nvPr/>
-        </p:nvPicPr>
-        <p:blipFill>
-          <a:blip r:embed="rId2">
-            <a:extLst>
-              <a:ext uri="{28A0092B-C50C-407E-A947-70E740481C1C}">
-                <a14:useLocalDpi xmlns:a14="http://schemas.microsoft.com/office/drawing/2010/main" val="0"/>
-              </a:ext>
-            </a:extLst>
-          </a:blip>
-          <a:stretch>
-            <a:fillRect/>
-          </a:stretch>
-        </p:blipFill>
-        <p:spPr>
-          <a:xfrm>
-            <a:off x="3851920" y="1340768"/>
-            <a:ext cx="1752600" cy="1409700"/>
-          </a:xfrm>
-          <a:prstGeom prst="rect">
-            <a:avLst/>
-          </a:prstGeom>
-        </p:spPr>
-      </p:pic>
       <p:pic>
         <p:nvPicPr>
           <p:cNvPr id="7" name="Picture 6" descr="A hexagon with a musical note and text&#10;&#10;Description automatically generated">
